--- a/docs/deliverables/to submit/C_lines Presentation.pptx
+++ b/docs/deliverables/to submit/C_lines Presentation.pptx
@@ -5,15 +5,15 @@
     <p:sldMasterId id="2147483648" r:id="rId1"/>
   </p:sldMasterIdLst>
   <p:sldIdLst>
-    <p:sldId id="256" r:id="rId4"/>
+    <p:sldId id="256" r:id="rId2"/>
     <p:sldId id="257" r:id="rId3"/>
-    <p:sldId id="258" r:id="rId2"/>
-    <p:sldId id="259" r:id="rId9"/>
-    <p:sldId id="260" r:id="rId10"/>
-    <p:sldId id="261" r:id="rId11"/>
-    <p:sldId id="262" r:id="rId12"/>
-    <p:sldId id="263" r:id="rId13"/>
-    <p:sldId id="264" r:id="rId14"/>
+    <p:sldId id="258" r:id="rId4"/>
+    <p:sldId id="259" r:id="rId5"/>
+    <p:sldId id="260" r:id="rId6"/>
+    <p:sldId id="261" r:id="rId7"/>
+    <p:sldId id="262" r:id="rId8"/>
+    <p:sldId id="263" r:id="rId9"/>
+    <p:sldId id="264" r:id="rId10"/>
   </p:sldIdLst>
   <p:sldSz cx="12192000" cy="6858000"/>
   <p:notesSz cx="6858000" cy="9144000"/>
@@ -267,7 +267,7 @@
           <a:p>
             <a:fld id="{528966A4-F9E1-4082-9BF6-427132D10FA3}" type="datetimeFigureOut">
               <a:rPr lang="en-US" smtClean="0"/>
-              <a:t>2/4/2025</a:t>
+              <a:t>6/5/2026</a:t>
             </a:fld>
             <a:endParaRPr lang="en-US"/>
           </a:p>
@@ -465,7 +465,7 @@
           <a:p>
             <a:fld id="{528966A4-F9E1-4082-9BF6-427132D10FA3}" type="datetimeFigureOut">
               <a:rPr lang="en-US" smtClean="0"/>
-              <a:t>2/4/2025</a:t>
+              <a:t>6/5/2026</a:t>
             </a:fld>
             <a:endParaRPr lang="en-US"/>
           </a:p>
@@ -673,7 +673,7 @@
           <a:p>
             <a:fld id="{528966A4-F9E1-4082-9BF6-427132D10FA3}" type="datetimeFigureOut">
               <a:rPr lang="en-US" smtClean="0"/>
-              <a:t>2/4/2025</a:t>
+              <a:t>6/5/2026</a:t>
             </a:fld>
             <a:endParaRPr lang="en-US"/>
           </a:p>
@@ -871,7 +871,7 @@
           <a:p>
             <a:fld id="{528966A4-F9E1-4082-9BF6-427132D10FA3}" type="datetimeFigureOut">
               <a:rPr lang="en-US" smtClean="0"/>
-              <a:t>2/4/2025</a:t>
+              <a:t>6/5/2026</a:t>
             </a:fld>
             <a:endParaRPr lang="en-US"/>
           </a:p>
@@ -1146,7 +1146,7 @@
           <a:p>
             <a:fld id="{528966A4-F9E1-4082-9BF6-427132D10FA3}" type="datetimeFigureOut">
               <a:rPr lang="en-US" smtClean="0"/>
-              <a:t>2/4/2025</a:t>
+              <a:t>6/5/2026</a:t>
             </a:fld>
             <a:endParaRPr lang="en-US"/>
           </a:p>
@@ -1411,7 +1411,7 @@
           <a:p>
             <a:fld id="{528966A4-F9E1-4082-9BF6-427132D10FA3}" type="datetimeFigureOut">
               <a:rPr lang="en-US" smtClean="0"/>
-              <a:t>2/4/2025</a:t>
+              <a:t>6/5/2026</a:t>
             </a:fld>
             <a:endParaRPr lang="en-US"/>
           </a:p>
@@ -1823,7 +1823,7 @@
           <a:p>
             <a:fld id="{528966A4-F9E1-4082-9BF6-427132D10FA3}" type="datetimeFigureOut">
               <a:rPr lang="en-US" smtClean="0"/>
-              <a:t>2/4/2025</a:t>
+              <a:t>6/5/2026</a:t>
             </a:fld>
             <a:endParaRPr lang="en-US"/>
           </a:p>
@@ -1964,7 +1964,7 @@
           <a:p>
             <a:fld id="{528966A4-F9E1-4082-9BF6-427132D10FA3}" type="datetimeFigureOut">
               <a:rPr lang="en-US" smtClean="0"/>
-              <a:t>2/4/2025</a:t>
+              <a:t>6/5/2026</a:t>
             </a:fld>
             <a:endParaRPr lang="en-US"/>
           </a:p>
@@ -2077,7 +2077,7 @@
           <a:p>
             <a:fld id="{528966A4-F9E1-4082-9BF6-427132D10FA3}" type="datetimeFigureOut">
               <a:rPr lang="en-US" smtClean="0"/>
-              <a:t>2/4/2025</a:t>
+              <a:t>6/5/2026</a:t>
             </a:fld>
             <a:endParaRPr lang="en-US"/>
           </a:p>
@@ -2388,7 +2388,7 @@
           <a:p>
             <a:fld id="{528966A4-F9E1-4082-9BF6-427132D10FA3}" type="datetimeFigureOut">
               <a:rPr lang="en-US" smtClean="0"/>
-              <a:t>2/4/2025</a:t>
+              <a:t>6/5/2026</a:t>
             </a:fld>
             <a:endParaRPr lang="en-US"/>
           </a:p>
@@ -2676,7 +2676,7 @@
           <a:p>
             <a:fld id="{528966A4-F9E1-4082-9BF6-427132D10FA3}" type="datetimeFigureOut">
               <a:rPr lang="en-US" smtClean="0"/>
-              <a:t>2/4/2025</a:t>
+              <a:t>6/5/2026</a:t>
             </a:fld>
             <a:endParaRPr lang="en-US"/>
           </a:p>
@@ -2917,7 +2917,7 @@
           <a:p>
             <a:fld id="{528966A4-F9E1-4082-9BF6-427132D10FA3}" type="datetimeFigureOut">
               <a:rPr lang="en-US" smtClean="0"/>
-              <a:t>2/4/2025</a:t>
+              <a:t>6/5/2026</a:t>
             </a:fld>
             <a:endParaRPr lang="en-US"/>
           </a:p>
@@ -3318,7 +3318,7 @@
 </file>
 
 <file path=ppt/slides/slide1.xml><?xml version="1.0" encoding="utf-8"?>
-<p:sld xmlns:a="http://schemas.openxmlformats.org/drawingml/2006/main" xmlns:p="http://schemas.openxmlformats.org/presentationml/2006/main" xmlns:r="http://schemas.openxmlformats.org/officeDocument/2006/relationships">
+<p:sld xmlns:a="http://schemas.openxmlformats.org/drawingml/2006/main" xmlns:r="http://schemas.openxmlformats.org/officeDocument/2006/relationships" xmlns:p="http://schemas.openxmlformats.org/presentationml/2006/main">
   <p:cSld>
     <p:spTree>
       <p:nvGrpSpPr>
@@ -3326,7 +3326,14 @@
         <p:cNvGrpSpPr/>
         <p:nvPr/>
       </p:nvGrpSpPr>
-      <p:grpSpPr/>
+      <p:grpSpPr>
+        <a:xfrm>
+          <a:off x="0" y="0"/>
+          <a:ext cx="0" cy="0"/>
+          <a:chOff x="0" y="0"/>
+          <a:chExt cx="0" cy="0"/>
+        </a:xfrm>
+      </p:grpSpPr>
       <p:sp>
         <p:nvSpPr>
           <p:cNvPr id="2" name="Title 1"/>
@@ -3429,7 +3436,7 @@
 </file>
 
 <file path=ppt/slides/slide2.xml><?xml version="1.0" encoding="utf-8"?>
-<p:sld xmlns:a="http://schemas.openxmlformats.org/drawingml/2006/main" xmlns:p="http://schemas.openxmlformats.org/presentationml/2006/main" xmlns:r="http://schemas.openxmlformats.org/officeDocument/2006/relationships">
+<p:sld xmlns:a="http://schemas.openxmlformats.org/drawingml/2006/main" xmlns:r="http://schemas.openxmlformats.org/officeDocument/2006/relationships" xmlns:p="http://schemas.openxmlformats.org/presentationml/2006/main">
   <p:cSld>
     <p:spTree>
       <p:nvGrpSpPr>
@@ -3437,7 +3444,14 @@
         <p:cNvGrpSpPr/>
         <p:nvPr/>
       </p:nvGrpSpPr>
-      <p:grpSpPr/>
+      <p:grpSpPr>
+        <a:xfrm>
+          <a:off x="0" y="0"/>
+          <a:ext cx="0" cy="0"/>
+          <a:chOff x="0" y="0"/>
+          <a:chExt cx="0" cy="0"/>
+        </a:xfrm>
+      </p:grpSpPr>
       <p:sp>
         <p:nvSpPr>
           <p:cNvPr id="2" name="Title 1"/>
@@ -3640,7 +3654,7 @@
 </file>
 
 <file path=ppt/slides/slide3.xml><?xml version="1.0" encoding="utf-8"?>
-<p:sld xmlns:a="http://schemas.openxmlformats.org/drawingml/2006/main" xmlns:p="http://schemas.openxmlformats.org/presentationml/2006/main" xmlns:r="http://schemas.openxmlformats.org/officeDocument/2006/relationships">
+<p:sld xmlns:a="http://schemas.openxmlformats.org/drawingml/2006/main" xmlns:r="http://schemas.openxmlformats.org/officeDocument/2006/relationships" xmlns:p="http://schemas.openxmlformats.org/presentationml/2006/main">
   <p:cSld>
     <p:spTree>
       <p:nvGrpSpPr>
@@ -3648,7 +3662,14 @@
         <p:cNvGrpSpPr/>
         <p:nvPr/>
       </p:nvGrpSpPr>
-      <p:grpSpPr/>
+      <p:grpSpPr>
+        <a:xfrm>
+          <a:off x="0" y="0"/>
+          <a:ext cx="0" cy="0"/>
+          <a:chOff x="0" y="0"/>
+          <a:chExt cx="0" cy="0"/>
+        </a:xfrm>
+      </p:grpSpPr>
       <p:sp>
         <p:nvSpPr>
           <p:cNvPr id="2" name="Title 1"/>
@@ -3751,7 +3772,7 @@
           </a:fontRef>
         </p:style>
         <p:txBody>
-          <a:bodyPr rtlCol="0" anchor="ctr" wrap="square"/>
+          <a:bodyPr wrap="square" rtlCol="0" anchor="ctr"/>
           <a:lstStyle/>
           <a:p>
             <a:pPr algn="ctr"/>
@@ -3881,7 +3902,7 @@
           </a:fontRef>
         </p:style>
         <p:txBody>
-          <a:bodyPr rtlCol="0" anchor="ctr" wrap="square"/>
+          <a:bodyPr wrap="square" rtlCol="0" anchor="ctr"/>
           <a:lstStyle/>
           <a:p>
             <a:pPr algn="ctr"/>
@@ -4011,7 +4032,7 @@
           </a:fontRef>
         </p:style>
         <p:txBody>
-          <a:bodyPr rtlCol="0" anchor="ctr" wrap="square"/>
+          <a:bodyPr wrap="square" rtlCol="0" anchor="ctr"/>
           <a:lstStyle/>
           <a:p>
             <a:pPr algn="ctr"/>
@@ -4153,7 +4174,7 @@
 </file>
 
 <file path=ppt/slides/slide4.xml><?xml version="1.0" encoding="utf-8"?>
-<p:sld xmlns:a="http://schemas.openxmlformats.org/drawingml/2006/main" xmlns:p="http://schemas.openxmlformats.org/presentationml/2006/main" xmlns:r="http://schemas.openxmlformats.org/officeDocument/2006/relationships">
+<p:sld xmlns:a="http://schemas.openxmlformats.org/drawingml/2006/main" xmlns:r="http://schemas.openxmlformats.org/officeDocument/2006/relationships" xmlns:p="http://schemas.openxmlformats.org/presentationml/2006/main">
   <p:cSld>
     <p:spTree>
       <p:nvGrpSpPr>
@@ -4161,7 +4182,14 @@
         <p:cNvGrpSpPr/>
         <p:nvPr/>
       </p:nvGrpSpPr>
-      <p:grpSpPr/>
+      <p:grpSpPr>
+        <a:xfrm>
+          <a:off x="0" y="0"/>
+          <a:ext cx="0" cy="0"/>
+          <a:chOff x="0" y="0"/>
+          <a:chExt cx="0" cy="0"/>
+        </a:xfrm>
+      </p:grpSpPr>
       <p:sp>
         <p:nvSpPr>
           <p:cNvPr id="2" name="Title 1"/>
@@ -4264,7 +4292,7 @@
           </a:fontRef>
         </p:style>
         <p:txBody>
-          <a:bodyPr rtlCol="0" anchor="ctr" wrap="square"/>
+          <a:bodyPr wrap="square" rtlCol="0" anchor="ctr"/>
           <a:lstStyle/>
           <a:p>
             <a:pPr algn="ctr"/>
@@ -4356,7 +4384,7 @@
           </a:fontRef>
         </p:style>
         <p:txBody>
-          <a:bodyPr rtlCol="0" anchor="ctr" wrap="square"/>
+          <a:bodyPr wrap="square" rtlCol="0" anchor="ctr"/>
           <a:lstStyle/>
           <a:p>
             <a:pPr algn="ctr"/>
@@ -4448,7 +4476,7 @@
           </a:fontRef>
         </p:style>
         <p:txBody>
-          <a:bodyPr rtlCol="0" anchor="ctr" wrap="square"/>
+          <a:bodyPr wrap="square" rtlCol="0" anchor="ctr"/>
           <a:lstStyle/>
           <a:p>
             <a:pPr algn="ctr"/>
@@ -4540,7 +4568,7 @@
           </a:fontRef>
         </p:style>
         <p:txBody>
-          <a:bodyPr rtlCol="0" anchor="ctr" wrap="square"/>
+          <a:bodyPr wrap="square" rtlCol="0" anchor="ctr"/>
           <a:lstStyle/>
           <a:p>
             <a:pPr algn="ctr"/>
@@ -4779,7 +4807,7 @@
 </file>
 
 <file path=ppt/slides/slide5.xml><?xml version="1.0" encoding="utf-8"?>
-<p:sld xmlns:a="http://schemas.openxmlformats.org/drawingml/2006/main" xmlns:p="http://schemas.openxmlformats.org/presentationml/2006/main" xmlns:r="http://schemas.openxmlformats.org/officeDocument/2006/relationships">
+<p:sld xmlns:a="http://schemas.openxmlformats.org/drawingml/2006/main" xmlns:r="http://schemas.openxmlformats.org/officeDocument/2006/relationships" xmlns:p="http://schemas.openxmlformats.org/presentationml/2006/main">
   <p:cSld>
     <p:spTree>
       <p:nvGrpSpPr>
@@ -4787,7 +4815,14 @@
         <p:cNvGrpSpPr/>
         <p:nvPr/>
       </p:nvGrpSpPr>
-      <p:grpSpPr/>
+      <p:grpSpPr>
+        <a:xfrm>
+          <a:off x="0" y="0"/>
+          <a:ext cx="0" cy="0"/>
+          <a:chOff x="0" y="0"/>
+          <a:chExt cx="0" cy="0"/>
+        </a:xfrm>
+      </p:grpSpPr>
       <p:sp>
         <p:nvSpPr>
           <p:cNvPr id="2" name="Title 1"/>
@@ -4894,6 +4929,7 @@
           <a:lstStyle/>
           <a:p>
             <a:pPr algn="ctr"/>
+            <a:endParaRPr/>
           </a:p>
         </p:txBody>
       </p:sp>
@@ -4992,6 +5028,7 @@
           <a:lstStyle/>
           <a:p>
             <a:pPr algn="ctr"/>
+            <a:endParaRPr/>
           </a:p>
         </p:txBody>
       </p:sp>
@@ -5090,6 +5127,7 @@
           <a:lstStyle/>
           <a:p>
             <a:pPr algn="ctr"/>
+            <a:endParaRPr/>
           </a:p>
         </p:txBody>
       </p:sp>
@@ -5196,7 +5234,7 @@
 </file>
 
 <file path=ppt/slides/slide6.xml><?xml version="1.0" encoding="utf-8"?>
-<p:sld xmlns:a="http://schemas.openxmlformats.org/drawingml/2006/main" xmlns:p="http://schemas.openxmlformats.org/presentationml/2006/main" xmlns:r="http://schemas.openxmlformats.org/officeDocument/2006/relationships">
+<p:sld xmlns:a="http://schemas.openxmlformats.org/drawingml/2006/main" xmlns:r="http://schemas.openxmlformats.org/officeDocument/2006/relationships" xmlns:p="http://schemas.openxmlformats.org/presentationml/2006/main">
   <p:cSld>
     <p:spTree>
       <p:nvGrpSpPr>
@@ -5204,7 +5242,14 @@
         <p:cNvGrpSpPr/>
         <p:nvPr/>
       </p:nvGrpSpPr>
-      <p:grpSpPr/>
+      <p:grpSpPr>
+        <a:xfrm>
+          <a:off x="0" y="0"/>
+          <a:ext cx="0" cy="0"/>
+          <a:chOff x="0" y="0"/>
+          <a:chExt cx="0" cy="0"/>
+        </a:xfrm>
+      </p:grpSpPr>
       <p:sp>
         <p:nvSpPr>
           <p:cNvPr id="2" name="Title 1"/>
@@ -5469,7 +5514,7 @@
 </file>
 
 <file path=ppt/slides/slide7.xml><?xml version="1.0" encoding="utf-8"?>
-<p:sld xmlns:a="http://schemas.openxmlformats.org/drawingml/2006/main" xmlns:p="http://schemas.openxmlformats.org/presentationml/2006/main" xmlns:r="http://schemas.openxmlformats.org/officeDocument/2006/relationships">
+<p:sld xmlns:a="http://schemas.openxmlformats.org/drawingml/2006/main" xmlns:r="http://schemas.openxmlformats.org/officeDocument/2006/relationships" xmlns:p="http://schemas.openxmlformats.org/presentationml/2006/main">
   <p:cSld>
     <p:spTree>
       <p:nvGrpSpPr>
@@ -5477,7 +5522,14 @@
         <p:cNvGrpSpPr/>
         <p:nvPr/>
       </p:nvGrpSpPr>
-      <p:grpSpPr/>
+      <p:grpSpPr>
+        <a:xfrm>
+          <a:off x="0" y="0"/>
+          <a:ext cx="0" cy="0"/>
+          <a:chOff x="0" y="0"/>
+          <a:chExt cx="0" cy="0"/>
+        </a:xfrm>
+      </p:grpSpPr>
       <p:sp>
         <p:nvSpPr>
           <p:cNvPr id="2" name="Title 1"/>
@@ -5712,7 +5764,7 @@
 </file>
 
 <file path=ppt/slides/slide8.xml><?xml version="1.0" encoding="utf-8"?>
-<p:sld xmlns:a="http://schemas.openxmlformats.org/drawingml/2006/main" xmlns:p="http://schemas.openxmlformats.org/presentationml/2006/main" xmlns:r="http://schemas.openxmlformats.org/officeDocument/2006/relationships">
+<p:sld xmlns:a="http://schemas.openxmlformats.org/drawingml/2006/main" xmlns:r="http://schemas.openxmlformats.org/officeDocument/2006/relationships" xmlns:p="http://schemas.openxmlformats.org/presentationml/2006/main">
   <p:cSld>
     <p:spTree>
       <p:nvGrpSpPr>
@@ -5720,7 +5772,14 @@
         <p:cNvGrpSpPr/>
         <p:nvPr/>
       </p:nvGrpSpPr>
-      <p:grpSpPr/>
+      <p:grpSpPr>
+        <a:xfrm>
+          <a:off x="0" y="0"/>
+          <a:ext cx="0" cy="0"/>
+          <a:chOff x="0" y="0"/>
+          <a:chExt cx="0" cy="0"/>
+        </a:xfrm>
+      </p:grpSpPr>
       <p:sp>
         <p:nvSpPr>
           <p:cNvPr id="2" name="Title 1"/>
@@ -5827,6 +5886,7 @@
           <a:lstStyle/>
           <a:p>
             <a:pPr algn="ctr"/>
+            <a:endParaRPr/>
           </a:p>
         </p:txBody>
       </p:sp>
@@ -5925,6 +5985,7 @@
           <a:lstStyle/>
           <a:p>
             <a:pPr algn="ctr"/>
+            <a:endParaRPr/>
           </a:p>
         </p:txBody>
       </p:sp>
@@ -6023,6 +6084,7 @@
           <a:lstStyle/>
           <a:p>
             <a:pPr algn="ctr"/>
+            <a:endParaRPr/>
           </a:p>
         </p:txBody>
       </p:sp>
@@ -6121,6 +6183,7 @@
           <a:lstStyle/>
           <a:p>
             <a:pPr algn="ctr"/>
+            <a:endParaRPr/>
           </a:p>
         </p:txBody>
       </p:sp>
@@ -6188,7 +6251,7 @@
 </file>
 
 <file path=ppt/slides/slide9.xml><?xml version="1.0" encoding="utf-8"?>
-<p:sld xmlns:a="http://schemas.openxmlformats.org/drawingml/2006/main" xmlns:p="http://schemas.openxmlformats.org/presentationml/2006/main" xmlns:r="http://schemas.openxmlformats.org/officeDocument/2006/relationships">
+<p:sld xmlns:a="http://schemas.openxmlformats.org/drawingml/2006/main" xmlns:r="http://schemas.openxmlformats.org/officeDocument/2006/relationships" xmlns:p="http://schemas.openxmlformats.org/presentationml/2006/main">
   <p:cSld>
     <p:spTree>
       <p:nvGrpSpPr>
@@ -6196,7 +6259,14 @@
         <p:cNvGrpSpPr/>
         <p:nvPr/>
       </p:nvGrpSpPr>
-      <p:grpSpPr/>
+      <p:grpSpPr>
+        <a:xfrm>
+          <a:off x="0" y="0"/>
+          <a:ext cx="0" cy="0"/>
+          <a:chOff x="0" y="0"/>
+          <a:chExt cx="0" cy="0"/>
+        </a:xfrm>
+      </p:grpSpPr>
       <p:sp>
         <p:nvSpPr>
           <p:cNvPr id="2" name="Title 1"/>
